--- a/docs/PourAccord_Pitch_Investisseurs.pptx
+++ b/docs/PourAccord_Pitch_Investisseurs.pptx
@@ -14929,7 +14929,7 @@
         <p:spPr>
           <a:xfrm>
             <a:off x="4297680" y="3520440"/>
-            <a:ext cx="4526280" cy="1371600"/>
+            <a:ext cx="4526280" cy="1529542"/>
           </a:xfrm>
           <a:prstGeom prst="rect">
             <a:avLst/>

--- a/docs/PourAccord_Pitch_Investisseurs.pptx
+++ b/docs/PourAccord_Pitch_Investisseurs.pptx
@@ -5860,8 +5860,8 @@
         </p:nvSpPr>
         <p:spPr>
           <a:xfrm>
-            <a:off x="4709160" y="3319272"/>
-            <a:ext cx="960120" cy="347472"/>
+            <a:off x="4389120" y="3319272"/>
+            <a:ext cx="1280160" cy="347472"/>
           </a:xfrm>
           <a:prstGeom prst="rect">
             <a:avLst/>
@@ -17068,7 +17068,7 @@
         </p:nvGraphicFramePr>
         <p:xfrm>
           <a:off x="320040" y="1051560"/>
-          <a:ext cx="8503920" cy="3200400"/>
+          <a:ext cx="7818120" cy="3182112"/>
         </p:xfrm>
         <a:graphic>
           <a:graphicData uri="http://schemas.openxmlformats.org/drawingml/2006/table">
